--- a/Pregrado/Creatividad y pensamiento innovador/Clases/Sesion 05 - Análisis de negocios · validación de la propuesta/Presentacion.pptx
+++ b/Pregrado/Creatividad y pensamiento innovador/Clases/Sesion 05 - Análisis de negocios · validación de la propuesta/Presentacion.pptx
@@ -3373,41 +3373,6 @@
           </a:p>
         </p:txBody>
       </p:sp>
-      <p:sp>
-        <p:nvSpPr>
-          <p:cNvPr id="7" name="TextBox 6"/>
-          <p:cNvSpPr txBox="1"/>
-          <p:nvPr/>
-        </p:nvSpPr>
-        <p:spPr>
-          <a:xfrm>
-            <a:off x="2194560" y="6446520"/>
-            <a:ext cx="5943600" cy="274320"/>
-          </a:xfrm>
-          <a:prstGeom prst="rect">
-            <a:avLst/>
-          </a:prstGeom>
-          <a:noFill/>
-        </p:spPr>
-        <p:txBody>
-          <a:bodyPr wrap="square" anchor="t" lIns="0" rIns="0" tIns="0" bIns="0">
-            <a:spAutoFit/>
-          </a:bodyPr>
-          <a:lstStyle/>
-          <a:p>
-            <a:pPr algn="l"/>
-            <a:r>
-              <a:rPr sz="1000" b="1" i="0">
-                <a:solidFill>
-                  <a:srgbClr val="8F989D"/>
-                </a:solidFill>
-                <a:latin typeface="Calibri"/>
-              </a:rPr>
-              <a:t>Inicio 5:10 pm</a:t>
-            </a:r>
-          </a:p>
-        </p:txBody>
-      </p:sp>
     </p:spTree>
   </p:cSld>
   <p:clrMapOvr>
@@ -3868,41 +3833,6 @@
         </p:nvSpPr>
         <p:spPr>
           <a:xfrm>
-            <a:off x="2194560" y="6446520"/>
-            <a:ext cx="5943600" cy="274320"/>
-          </a:xfrm>
-          <a:prstGeom prst="rect">
-            <a:avLst/>
-          </a:prstGeom>
-          <a:noFill/>
-        </p:spPr>
-        <p:txBody>
-          <a:bodyPr wrap="square" anchor="t" lIns="0" rIns="0" tIns="0" bIns="0">
-            <a:spAutoFit/>
-          </a:bodyPr>
-          <a:lstStyle/>
-          <a:p>
-            <a:pPr algn="l"/>
-            <a:r>
-              <a:rPr sz="1000" b="1" i="0">
-                <a:solidFill>
-                  <a:srgbClr val="8F989D"/>
-                </a:solidFill>
-                <a:latin typeface="Calibri"/>
-              </a:rPr>
-              <a:t>Inicio 5:10 pm</a:t>
-            </a:r>
-          </a:p>
-        </p:txBody>
-      </p:sp>
-      <p:sp>
-        <p:nvSpPr>
-          <p:cNvPr id="6" name="TextBox 5"/>
-          <p:cNvSpPr txBox="1"/>
-          <p:nvPr/>
-        </p:nvSpPr>
-        <p:spPr>
-          <a:xfrm>
             <a:off x="11094415" y="6446520"/>
             <a:ext cx="548640" cy="274320"/>
           </a:xfrm>
@@ -4095,41 +4025,6 @@
       <p:sp>
         <p:nvSpPr>
           <p:cNvPr id="5" name="TextBox 4"/>
-          <p:cNvSpPr txBox="1"/>
-          <p:nvPr/>
-        </p:nvSpPr>
-        <p:spPr>
-          <a:xfrm>
-            <a:off x="2194560" y="6446520"/>
-            <a:ext cx="5943600" cy="274320"/>
-          </a:xfrm>
-          <a:prstGeom prst="rect">
-            <a:avLst/>
-          </a:prstGeom>
-          <a:noFill/>
-        </p:spPr>
-        <p:txBody>
-          <a:bodyPr wrap="square" anchor="t" lIns="0" rIns="0" tIns="0" bIns="0">
-            <a:spAutoFit/>
-          </a:bodyPr>
-          <a:lstStyle/>
-          <a:p>
-            <a:pPr algn="l"/>
-            <a:r>
-              <a:rPr sz="1000" b="1" i="0">
-                <a:solidFill>
-                  <a:srgbClr val="8F989D"/>
-                </a:solidFill>
-                <a:latin typeface="Calibri"/>
-              </a:rPr>
-              <a:t>Inicio 5:10 pm</a:t>
-            </a:r>
-          </a:p>
-        </p:txBody>
-      </p:sp>
-      <p:sp>
-        <p:nvSpPr>
-          <p:cNvPr id="6" name="TextBox 5"/>
           <p:cNvSpPr txBox="1"/>
           <p:nvPr/>
         </p:nvSpPr>
@@ -4861,41 +4756,6 @@
         </p:nvSpPr>
         <p:spPr>
           <a:xfrm>
-            <a:off x="2194560" y="6446520"/>
-            <a:ext cx="5943600" cy="274320"/>
-          </a:xfrm>
-          <a:prstGeom prst="rect">
-            <a:avLst/>
-          </a:prstGeom>
-          <a:noFill/>
-        </p:spPr>
-        <p:txBody>
-          <a:bodyPr wrap="square" anchor="t" lIns="0" rIns="0" tIns="0" bIns="0">
-            <a:spAutoFit/>
-          </a:bodyPr>
-          <a:lstStyle/>
-          <a:p>
-            <a:pPr algn="l"/>
-            <a:r>
-              <a:rPr sz="1000" b="1" i="0">
-                <a:solidFill>
-                  <a:srgbClr val="8F989D"/>
-                </a:solidFill>
-                <a:latin typeface="Calibri"/>
-              </a:rPr>
-              <a:t>Inicio 5:10 pm</a:t>
-            </a:r>
-          </a:p>
-        </p:txBody>
-      </p:sp>
-      <p:sp>
-        <p:nvSpPr>
-          <p:cNvPr id="7" name="TextBox 6"/>
-          <p:cNvSpPr txBox="1"/>
-          <p:nvPr/>
-        </p:nvSpPr>
-        <p:spPr>
-          <a:xfrm>
             <a:off x="11094415" y="6446520"/>
             <a:ext cx="548640" cy="274320"/>
           </a:xfrm>
@@ -5491,41 +5351,6 @@
         </p:nvSpPr>
         <p:spPr>
           <a:xfrm>
-            <a:off x="2194560" y="6446520"/>
-            <a:ext cx="5943600" cy="274320"/>
-          </a:xfrm>
-          <a:prstGeom prst="rect">
-            <a:avLst/>
-          </a:prstGeom>
-          <a:noFill/>
-        </p:spPr>
-        <p:txBody>
-          <a:bodyPr wrap="square" anchor="t" lIns="0" rIns="0" tIns="0" bIns="0">
-            <a:spAutoFit/>
-          </a:bodyPr>
-          <a:lstStyle/>
-          <a:p>
-            <a:pPr algn="l"/>
-            <a:r>
-              <a:rPr sz="1000" b="1" i="0">
-                <a:solidFill>
-                  <a:srgbClr val="8F989D"/>
-                </a:solidFill>
-                <a:latin typeface="Calibri"/>
-              </a:rPr>
-              <a:t>Inicio 5:10 pm</a:t>
-            </a:r>
-          </a:p>
-        </p:txBody>
-      </p:sp>
-      <p:sp>
-        <p:nvSpPr>
-          <p:cNvPr id="6" name="TextBox 5"/>
-          <p:cNvSpPr txBox="1"/>
-          <p:nvPr/>
-        </p:nvSpPr>
-        <p:spPr>
-          <a:xfrm>
             <a:off x="11094415" y="6446520"/>
             <a:ext cx="548640" cy="274320"/>
           </a:xfrm>
@@ -5723,41 +5548,6 @@
         </p:nvSpPr>
         <p:spPr>
           <a:xfrm>
-            <a:off x="2194560" y="6446520"/>
-            <a:ext cx="5943600" cy="274320"/>
-          </a:xfrm>
-          <a:prstGeom prst="rect">
-            <a:avLst/>
-          </a:prstGeom>
-          <a:noFill/>
-        </p:spPr>
-        <p:txBody>
-          <a:bodyPr wrap="square" anchor="t" lIns="0" rIns="0" tIns="0" bIns="0">
-            <a:spAutoFit/>
-          </a:bodyPr>
-          <a:lstStyle/>
-          <a:p>
-            <a:pPr algn="l"/>
-            <a:r>
-              <a:rPr sz="1000" b="1" i="0">
-                <a:solidFill>
-                  <a:srgbClr val="8F989D"/>
-                </a:solidFill>
-                <a:latin typeface="Calibri"/>
-              </a:rPr>
-              <a:t>Inicio 5:10 pm</a:t>
-            </a:r>
-          </a:p>
-        </p:txBody>
-      </p:sp>
-      <p:sp>
-        <p:nvSpPr>
-          <p:cNvPr id="6" name="TextBox 5"/>
-          <p:cNvSpPr txBox="1"/>
-          <p:nvPr/>
-        </p:nvSpPr>
-        <p:spPr>
-          <a:xfrm>
             <a:off x="11094415" y="6446520"/>
             <a:ext cx="548640" cy="274320"/>
           </a:xfrm>
@@ -6389,41 +6179,6 @@
         </p:nvSpPr>
         <p:spPr>
           <a:xfrm>
-            <a:off x="2194560" y="6446520"/>
-            <a:ext cx="5943600" cy="274320"/>
-          </a:xfrm>
-          <a:prstGeom prst="rect">
-            <a:avLst/>
-          </a:prstGeom>
-          <a:noFill/>
-        </p:spPr>
-        <p:txBody>
-          <a:bodyPr wrap="square" anchor="t" lIns="0" rIns="0" tIns="0" bIns="0">
-            <a:spAutoFit/>
-          </a:bodyPr>
-          <a:lstStyle/>
-          <a:p>
-            <a:pPr algn="l"/>
-            <a:r>
-              <a:rPr sz="1000" b="1" i="0">
-                <a:solidFill>
-                  <a:srgbClr val="8F989D"/>
-                </a:solidFill>
-                <a:latin typeface="Calibri"/>
-              </a:rPr>
-              <a:t>Inicio 5:10 pm</a:t>
-            </a:r>
-          </a:p>
-        </p:txBody>
-      </p:sp>
-      <p:sp>
-        <p:nvSpPr>
-          <p:cNvPr id="6" name="TextBox 5"/>
-          <p:cNvSpPr txBox="1"/>
-          <p:nvPr/>
-        </p:nvSpPr>
-        <p:spPr>
-          <a:xfrm>
             <a:off x="11094415" y="6446520"/>
             <a:ext cx="548640" cy="274320"/>
           </a:xfrm>
@@ -6621,41 +6376,6 @@
         </p:nvSpPr>
         <p:spPr>
           <a:xfrm>
-            <a:off x="2194560" y="6446520"/>
-            <a:ext cx="5943600" cy="274320"/>
-          </a:xfrm>
-          <a:prstGeom prst="rect">
-            <a:avLst/>
-          </a:prstGeom>
-          <a:noFill/>
-        </p:spPr>
-        <p:txBody>
-          <a:bodyPr wrap="square" anchor="t" lIns="0" rIns="0" tIns="0" bIns="0">
-            <a:spAutoFit/>
-          </a:bodyPr>
-          <a:lstStyle/>
-          <a:p>
-            <a:pPr algn="l"/>
-            <a:r>
-              <a:rPr sz="1000" b="1" i="0">
-                <a:solidFill>
-                  <a:srgbClr val="8F989D"/>
-                </a:solidFill>
-                <a:latin typeface="Calibri"/>
-              </a:rPr>
-              <a:t>Inicio 5:10 pm</a:t>
-            </a:r>
-          </a:p>
-        </p:txBody>
-      </p:sp>
-      <p:sp>
-        <p:nvSpPr>
-          <p:cNvPr id="6" name="TextBox 5"/>
-          <p:cNvSpPr txBox="1"/>
-          <p:nvPr/>
-        </p:nvSpPr>
-        <p:spPr>
-          <a:xfrm>
             <a:off x="11094415" y="6446520"/>
             <a:ext cx="548640" cy="274320"/>
           </a:xfrm>
@@ -6685,7 +6405,7 @@
       </p:sp>
       <p:sp>
         <p:nvSpPr>
-          <p:cNvPr id="7" name="TextBox 6"/>
+          <p:cNvPr id="6" name="TextBox 5"/>
           <p:cNvSpPr txBox="1"/>
           <p:nvPr/>
         </p:nvSpPr>
@@ -7408,41 +7128,6 @@
         </p:nvSpPr>
         <p:spPr>
           <a:xfrm>
-            <a:off x="2194560" y="6446520"/>
-            <a:ext cx="5943600" cy="274320"/>
-          </a:xfrm>
-          <a:prstGeom prst="rect">
-            <a:avLst/>
-          </a:prstGeom>
-          <a:noFill/>
-        </p:spPr>
-        <p:txBody>
-          <a:bodyPr wrap="square" anchor="t" lIns="0" rIns="0" tIns="0" bIns="0">
-            <a:spAutoFit/>
-          </a:bodyPr>
-          <a:lstStyle/>
-          <a:p>
-            <a:pPr algn="l"/>
-            <a:r>
-              <a:rPr sz="1000" b="1" i="0">
-                <a:solidFill>
-                  <a:srgbClr val="8F989D"/>
-                </a:solidFill>
-                <a:latin typeface="Calibri"/>
-              </a:rPr>
-              <a:t>Inicio 5:10 pm</a:t>
-            </a:r>
-          </a:p>
-        </p:txBody>
-      </p:sp>
-      <p:sp>
-        <p:nvSpPr>
-          <p:cNvPr id="7" name="TextBox 6"/>
-          <p:cNvSpPr txBox="1"/>
-          <p:nvPr/>
-        </p:nvSpPr>
-        <p:spPr>
-          <a:xfrm>
             <a:off x="11094415" y="6446520"/>
             <a:ext cx="548640" cy="274320"/>
           </a:xfrm>
@@ -7928,41 +7613,6 @@
         </p:nvSpPr>
         <p:spPr>
           <a:xfrm>
-            <a:off x="2194560" y="6446520"/>
-            <a:ext cx="5943600" cy="274320"/>
-          </a:xfrm>
-          <a:prstGeom prst="rect">
-            <a:avLst/>
-          </a:prstGeom>
-          <a:noFill/>
-        </p:spPr>
-        <p:txBody>
-          <a:bodyPr wrap="square" anchor="t" lIns="0" rIns="0" tIns="0" bIns="0">
-            <a:spAutoFit/>
-          </a:bodyPr>
-          <a:lstStyle/>
-          <a:p>
-            <a:pPr algn="l"/>
-            <a:r>
-              <a:rPr sz="1000" b="1" i="0">
-                <a:solidFill>
-                  <a:srgbClr val="8F989D"/>
-                </a:solidFill>
-                <a:latin typeface="Calibri"/>
-              </a:rPr>
-              <a:t>Inicio 5:10 pm</a:t>
-            </a:r>
-          </a:p>
-        </p:txBody>
-      </p:sp>
-      <p:sp>
-        <p:nvSpPr>
-          <p:cNvPr id="11" name="TextBox 10"/>
-          <p:cNvSpPr txBox="1"/>
-          <p:nvPr/>
-        </p:nvSpPr>
-        <p:spPr>
-          <a:xfrm>
             <a:off x="11094415" y="6446520"/>
             <a:ext cx="548640" cy="274320"/>
           </a:xfrm>
@@ -8466,41 +8116,6 @@
         </p:nvSpPr>
         <p:spPr>
           <a:xfrm>
-            <a:off x="2194560" y="6446520"/>
-            <a:ext cx="5943600" cy="274320"/>
-          </a:xfrm>
-          <a:prstGeom prst="rect">
-            <a:avLst/>
-          </a:prstGeom>
-          <a:noFill/>
-        </p:spPr>
-        <p:txBody>
-          <a:bodyPr wrap="square" anchor="t" lIns="0" rIns="0" tIns="0" bIns="0">
-            <a:spAutoFit/>
-          </a:bodyPr>
-          <a:lstStyle/>
-          <a:p>
-            <a:pPr algn="l"/>
-            <a:r>
-              <a:rPr sz="1000" b="1" i="0">
-                <a:solidFill>
-                  <a:srgbClr val="8F989D"/>
-                </a:solidFill>
-                <a:latin typeface="Calibri"/>
-              </a:rPr>
-              <a:t>Inicio 5:10 pm</a:t>
-            </a:r>
-          </a:p>
-        </p:txBody>
-      </p:sp>
-      <p:sp>
-        <p:nvSpPr>
-          <p:cNvPr id="11" name="TextBox 10"/>
-          <p:cNvSpPr txBox="1"/>
-          <p:nvPr/>
-        </p:nvSpPr>
-        <p:spPr>
-          <a:xfrm>
             <a:off x="11094415" y="6446520"/>
             <a:ext cx="548640" cy="274320"/>
           </a:xfrm>
@@ -8990,41 +8605,6 @@
         </p:nvSpPr>
         <p:spPr>
           <a:xfrm>
-            <a:off x="2194560" y="6446520"/>
-            <a:ext cx="5943600" cy="274320"/>
-          </a:xfrm>
-          <a:prstGeom prst="rect">
-            <a:avLst/>
-          </a:prstGeom>
-          <a:noFill/>
-        </p:spPr>
-        <p:txBody>
-          <a:bodyPr wrap="square" anchor="t" lIns="0" rIns="0" tIns="0" bIns="0">
-            <a:spAutoFit/>
-          </a:bodyPr>
-          <a:lstStyle/>
-          <a:p>
-            <a:pPr algn="l"/>
-            <a:r>
-              <a:rPr sz="1000" b="1" i="0">
-                <a:solidFill>
-                  <a:srgbClr val="8F989D"/>
-                </a:solidFill>
-                <a:latin typeface="Calibri"/>
-              </a:rPr>
-              <a:t>Inicio 5:10 pm</a:t>
-            </a:r>
-          </a:p>
-        </p:txBody>
-      </p:sp>
-      <p:sp>
-        <p:nvSpPr>
-          <p:cNvPr id="6" name="TextBox 5"/>
-          <p:cNvSpPr txBox="1"/>
-          <p:nvPr/>
-        </p:nvSpPr>
-        <p:spPr>
-          <a:xfrm>
             <a:off x="11094415" y="6446520"/>
             <a:ext cx="548640" cy="274320"/>
           </a:xfrm>
@@ -9692,41 +9272,6 @@
         </p:nvSpPr>
         <p:spPr>
           <a:xfrm>
-            <a:off x="2194560" y="6446520"/>
-            <a:ext cx="5943600" cy="274320"/>
-          </a:xfrm>
-          <a:prstGeom prst="rect">
-            <a:avLst/>
-          </a:prstGeom>
-          <a:noFill/>
-        </p:spPr>
-        <p:txBody>
-          <a:bodyPr wrap="square" anchor="t" lIns="0" rIns="0" tIns="0" bIns="0">
-            <a:spAutoFit/>
-          </a:bodyPr>
-          <a:lstStyle/>
-          <a:p>
-            <a:pPr algn="l"/>
-            <a:r>
-              <a:rPr sz="1000" b="1" i="0">
-                <a:solidFill>
-                  <a:srgbClr val="8F989D"/>
-                </a:solidFill>
-                <a:latin typeface="Calibri"/>
-              </a:rPr>
-              <a:t>Inicio 5:10 pm</a:t>
-            </a:r>
-          </a:p>
-        </p:txBody>
-      </p:sp>
-      <p:sp>
-        <p:nvSpPr>
-          <p:cNvPr id="6" name="TextBox 5"/>
-          <p:cNvSpPr txBox="1"/>
-          <p:nvPr/>
-        </p:nvSpPr>
-        <p:spPr>
-          <a:xfrm>
             <a:off x="11094415" y="6446520"/>
             <a:ext cx="548640" cy="274320"/>
           </a:xfrm>
@@ -9942,41 +9487,6 @@
         </p:nvSpPr>
         <p:spPr>
           <a:xfrm>
-            <a:off x="2194560" y="6446520"/>
-            <a:ext cx="5943600" cy="274320"/>
-          </a:xfrm>
-          <a:prstGeom prst="rect">
-            <a:avLst/>
-          </a:prstGeom>
-          <a:noFill/>
-        </p:spPr>
-        <p:txBody>
-          <a:bodyPr wrap="square" anchor="t" lIns="0" rIns="0" tIns="0" bIns="0">
-            <a:spAutoFit/>
-          </a:bodyPr>
-          <a:lstStyle/>
-          <a:p>
-            <a:pPr algn="l"/>
-            <a:r>
-              <a:rPr sz="1000" b="1" i="0">
-                <a:solidFill>
-                  <a:srgbClr val="8F989D"/>
-                </a:solidFill>
-                <a:latin typeface="Calibri"/>
-              </a:rPr>
-              <a:t>Inicio 5:10 pm</a:t>
-            </a:r>
-          </a:p>
-        </p:txBody>
-      </p:sp>
-      <p:sp>
-        <p:nvSpPr>
-          <p:cNvPr id="6" name="TextBox 5"/>
-          <p:cNvSpPr txBox="1"/>
-          <p:nvPr/>
-        </p:nvSpPr>
-        <p:spPr>
-          <a:xfrm>
             <a:off x="11094415" y="6446520"/>
             <a:ext cx="548640" cy="274320"/>
           </a:xfrm>
@@ -10572,41 +10082,6 @@
         </p:nvSpPr>
         <p:spPr>
           <a:xfrm>
-            <a:off x="2194560" y="6446520"/>
-            <a:ext cx="5943600" cy="274320"/>
-          </a:xfrm>
-          <a:prstGeom prst="rect">
-            <a:avLst/>
-          </a:prstGeom>
-          <a:noFill/>
-        </p:spPr>
-        <p:txBody>
-          <a:bodyPr wrap="square" anchor="t" lIns="0" rIns="0" tIns="0" bIns="0">
-            <a:spAutoFit/>
-          </a:bodyPr>
-          <a:lstStyle/>
-          <a:p>
-            <a:pPr algn="l"/>
-            <a:r>
-              <a:rPr sz="1000" b="1" i="0">
-                <a:solidFill>
-                  <a:srgbClr val="8F989D"/>
-                </a:solidFill>
-                <a:latin typeface="Calibri"/>
-              </a:rPr>
-              <a:t>Inicio 5:10 pm</a:t>
-            </a:r>
-          </a:p>
-        </p:txBody>
-      </p:sp>
-      <p:sp>
-        <p:nvSpPr>
-          <p:cNvPr id="6" name="TextBox 5"/>
-          <p:cNvSpPr txBox="1"/>
-          <p:nvPr/>
-        </p:nvSpPr>
-        <p:spPr>
-          <a:xfrm>
             <a:off x="11094415" y="6446520"/>
             <a:ext cx="548640" cy="274320"/>
           </a:xfrm>
@@ -10636,7 +10111,7 @@
       </p:sp>
       <p:sp>
         <p:nvSpPr>
-          <p:cNvPr id="7" name="TextBox 6"/>
+          <p:cNvPr id="6" name="TextBox 5"/>
           <p:cNvSpPr txBox="1"/>
           <p:nvPr/>
         </p:nvSpPr>
@@ -11308,41 +10783,6 @@
         </p:nvSpPr>
         <p:spPr>
           <a:xfrm>
-            <a:off x="2194560" y="6446520"/>
-            <a:ext cx="5943600" cy="274320"/>
-          </a:xfrm>
-          <a:prstGeom prst="rect">
-            <a:avLst/>
-          </a:prstGeom>
-          <a:noFill/>
-        </p:spPr>
-        <p:txBody>
-          <a:bodyPr wrap="square" anchor="t" lIns="0" rIns="0" tIns="0" bIns="0">
-            <a:spAutoFit/>
-          </a:bodyPr>
-          <a:lstStyle/>
-          <a:p>
-            <a:pPr algn="l"/>
-            <a:r>
-              <a:rPr sz="1000" b="1" i="0">
-                <a:solidFill>
-                  <a:srgbClr val="8F989D"/>
-                </a:solidFill>
-                <a:latin typeface="Calibri"/>
-              </a:rPr>
-              <a:t>Inicio 5:10 pm</a:t>
-            </a:r>
-          </a:p>
-        </p:txBody>
-      </p:sp>
-      <p:sp>
-        <p:nvSpPr>
-          <p:cNvPr id="6" name="TextBox 5"/>
-          <p:cNvSpPr txBox="1"/>
-          <p:nvPr/>
-        </p:nvSpPr>
-        <p:spPr>
-          <a:xfrm>
             <a:off x="11094415" y="6446520"/>
             <a:ext cx="548640" cy="274320"/>
           </a:xfrm>
@@ -11911,41 +11351,6 @@
         </p:nvSpPr>
         <p:spPr>
           <a:xfrm>
-            <a:off x="2194560" y="6446520"/>
-            <a:ext cx="5943600" cy="274320"/>
-          </a:xfrm>
-          <a:prstGeom prst="rect">
-            <a:avLst/>
-          </a:prstGeom>
-          <a:noFill/>
-        </p:spPr>
-        <p:txBody>
-          <a:bodyPr wrap="square" anchor="t" lIns="0" rIns="0" tIns="0" bIns="0">
-            <a:spAutoFit/>
-          </a:bodyPr>
-          <a:lstStyle/>
-          <a:p>
-            <a:pPr algn="l"/>
-            <a:r>
-              <a:rPr sz="1000" b="1" i="0">
-                <a:solidFill>
-                  <a:srgbClr val="8F989D"/>
-                </a:solidFill>
-                <a:latin typeface="Calibri"/>
-              </a:rPr>
-              <a:t>Inicio 5:10 pm</a:t>
-            </a:r>
-          </a:p>
-        </p:txBody>
-      </p:sp>
-      <p:sp>
-        <p:nvSpPr>
-          <p:cNvPr id="6" name="TextBox 5"/>
-          <p:cNvSpPr txBox="1"/>
-          <p:nvPr/>
-        </p:nvSpPr>
-        <p:spPr>
-          <a:xfrm>
             <a:off x="11094415" y="6446520"/>
             <a:ext cx="548640" cy="274320"/>
           </a:xfrm>
@@ -12161,41 +11566,6 @@
         </p:nvSpPr>
         <p:spPr>
           <a:xfrm>
-            <a:off x="2194560" y="6446520"/>
-            <a:ext cx="5943600" cy="274320"/>
-          </a:xfrm>
-          <a:prstGeom prst="rect">
-            <a:avLst/>
-          </a:prstGeom>
-          <a:noFill/>
-        </p:spPr>
-        <p:txBody>
-          <a:bodyPr wrap="square" anchor="t" lIns="0" rIns="0" tIns="0" bIns="0">
-            <a:spAutoFit/>
-          </a:bodyPr>
-          <a:lstStyle/>
-          <a:p>
-            <a:pPr algn="l"/>
-            <a:r>
-              <a:rPr sz="1000" b="1" i="0">
-                <a:solidFill>
-                  <a:srgbClr val="8F989D"/>
-                </a:solidFill>
-                <a:latin typeface="Calibri"/>
-              </a:rPr>
-              <a:t>Inicio 5:10 pm</a:t>
-            </a:r>
-          </a:p>
-        </p:txBody>
-      </p:sp>
-      <p:sp>
-        <p:nvSpPr>
-          <p:cNvPr id="6" name="TextBox 5"/>
-          <p:cNvSpPr txBox="1"/>
-          <p:nvPr/>
-        </p:nvSpPr>
-        <p:spPr>
-          <a:xfrm>
             <a:off x="11094415" y="6446520"/>
             <a:ext cx="548640" cy="274320"/>
           </a:xfrm>
@@ -12442,41 +11812,6 @@
           </a:p>
         </p:txBody>
       </p:sp>
-      <p:sp>
-        <p:nvSpPr>
-          <p:cNvPr id="7" name="TextBox 6"/>
-          <p:cNvSpPr txBox="1"/>
-          <p:nvPr/>
-        </p:nvSpPr>
-        <p:spPr>
-          <a:xfrm>
-            <a:off x="2194560" y="6446520"/>
-            <a:ext cx="5943600" cy="274320"/>
-          </a:xfrm>
-          <a:prstGeom prst="rect">
-            <a:avLst/>
-          </a:prstGeom>
-          <a:noFill/>
-        </p:spPr>
-        <p:txBody>
-          <a:bodyPr wrap="square" anchor="t" lIns="0" rIns="0" tIns="0" bIns="0">
-            <a:spAutoFit/>
-          </a:bodyPr>
-          <a:lstStyle/>
-          <a:p>
-            <a:pPr algn="l"/>
-            <a:r>
-              <a:rPr sz="1000" b="1" i="0">
-                <a:solidFill>
-                  <a:srgbClr val="8F989D"/>
-                </a:solidFill>
-                <a:latin typeface="Calibri"/>
-              </a:rPr>
-              <a:t>Inicio 5:10 pm</a:t>
-            </a:r>
-          </a:p>
-        </p:txBody>
-      </p:sp>
     </p:spTree>
   </p:cSld>
   <p:clrMapOvr>
@@ -12964,41 +12299,6 @@
         </p:nvSpPr>
         <p:spPr>
           <a:xfrm>
-            <a:off x="2194560" y="6446520"/>
-            <a:ext cx="5943600" cy="274320"/>
-          </a:xfrm>
-          <a:prstGeom prst="rect">
-            <a:avLst/>
-          </a:prstGeom>
-          <a:noFill/>
-        </p:spPr>
-        <p:txBody>
-          <a:bodyPr wrap="square" anchor="t" lIns="0" rIns="0" tIns="0" bIns="0">
-            <a:spAutoFit/>
-          </a:bodyPr>
-          <a:lstStyle/>
-          <a:p>
-            <a:pPr algn="l"/>
-            <a:r>
-              <a:rPr sz="1000" b="1" i="0">
-                <a:solidFill>
-                  <a:srgbClr val="8F989D"/>
-                </a:solidFill>
-                <a:latin typeface="Calibri"/>
-              </a:rPr>
-              <a:t>Inicio 5:10 pm</a:t>
-            </a:r>
-          </a:p>
-        </p:txBody>
-      </p:sp>
-      <p:sp>
-        <p:nvSpPr>
-          <p:cNvPr id="6" name="TextBox 5"/>
-          <p:cNvSpPr txBox="1"/>
-          <p:nvPr/>
-        </p:nvSpPr>
-        <p:spPr>
-          <a:xfrm>
             <a:off x="11094415" y="6446520"/>
             <a:ext cx="548640" cy="274320"/>
           </a:xfrm>
@@ -13191,41 +12491,6 @@
       <p:sp>
         <p:nvSpPr>
           <p:cNvPr id="5" name="TextBox 4"/>
-          <p:cNvSpPr txBox="1"/>
-          <p:nvPr/>
-        </p:nvSpPr>
-        <p:spPr>
-          <a:xfrm>
-            <a:off x="2194560" y="6446520"/>
-            <a:ext cx="5943600" cy="274320"/>
-          </a:xfrm>
-          <a:prstGeom prst="rect">
-            <a:avLst/>
-          </a:prstGeom>
-          <a:noFill/>
-        </p:spPr>
-        <p:txBody>
-          <a:bodyPr wrap="square" anchor="t" lIns="0" rIns="0" tIns="0" bIns="0">
-            <a:spAutoFit/>
-          </a:bodyPr>
-          <a:lstStyle/>
-          <a:p>
-            <a:pPr algn="l"/>
-            <a:r>
-              <a:rPr sz="1000" b="1" i="0">
-                <a:solidFill>
-                  <a:srgbClr val="8F989D"/>
-                </a:solidFill>
-                <a:latin typeface="Calibri"/>
-              </a:rPr>
-              <a:t>Inicio 5:10 pm</a:t>
-            </a:r>
-          </a:p>
-        </p:txBody>
-      </p:sp>
-      <p:sp>
-        <p:nvSpPr>
-          <p:cNvPr id="6" name="TextBox 5"/>
           <p:cNvSpPr txBox="1"/>
           <p:nvPr/>
         </p:nvSpPr>
@@ -13913,41 +13178,6 @@
         </p:nvSpPr>
         <p:spPr>
           <a:xfrm>
-            <a:off x="2194560" y="6446520"/>
-            <a:ext cx="5943600" cy="274320"/>
-          </a:xfrm>
-          <a:prstGeom prst="rect">
-            <a:avLst/>
-          </a:prstGeom>
-          <a:noFill/>
-        </p:spPr>
-        <p:txBody>
-          <a:bodyPr wrap="square" anchor="t" lIns="0" rIns="0" tIns="0" bIns="0">
-            <a:spAutoFit/>
-          </a:bodyPr>
-          <a:lstStyle/>
-          <a:p>
-            <a:pPr algn="l"/>
-            <a:r>
-              <a:rPr sz="1000" b="1" i="0">
-                <a:solidFill>
-                  <a:srgbClr val="8F989D"/>
-                </a:solidFill>
-                <a:latin typeface="Calibri"/>
-              </a:rPr>
-              <a:t>Inicio 5:10 pm</a:t>
-            </a:r>
-          </a:p>
-        </p:txBody>
-      </p:sp>
-      <p:sp>
-        <p:nvSpPr>
-          <p:cNvPr id="7" name="TextBox 6"/>
-          <p:cNvSpPr txBox="1"/>
-          <p:nvPr/>
-        </p:nvSpPr>
-        <p:spPr>
-          <a:xfrm>
             <a:off x="11094415" y="6446520"/>
             <a:ext cx="548640" cy="274320"/>
           </a:xfrm>
@@ -14430,41 +13660,6 @@
       <p:sp>
         <p:nvSpPr>
           <p:cNvPr id="5" name="TextBox 4"/>
-          <p:cNvSpPr txBox="1"/>
-          <p:nvPr/>
-        </p:nvSpPr>
-        <p:spPr>
-          <a:xfrm>
-            <a:off x="2194560" y="6446520"/>
-            <a:ext cx="5943600" cy="274320"/>
-          </a:xfrm>
-          <a:prstGeom prst="rect">
-            <a:avLst/>
-          </a:prstGeom>
-          <a:noFill/>
-        </p:spPr>
-        <p:txBody>
-          <a:bodyPr wrap="square" anchor="t" lIns="0" rIns="0" tIns="0" bIns="0">
-            <a:spAutoFit/>
-          </a:bodyPr>
-          <a:lstStyle/>
-          <a:p>
-            <a:pPr algn="l"/>
-            <a:r>
-              <a:rPr sz="1000" b="1" i="0">
-                <a:solidFill>
-                  <a:srgbClr val="8F989D"/>
-                </a:solidFill>
-                <a:latin typeface="Calibri"/>
-              </a:rPr>
-              <a:t>Inicio 5:10 pm</a:t>
-            </a:r>
-          </a:p>
-        </p:txBody>
-      </p:sp>
-      <p:sp>
-        <p:nvSpPr>
-          <p:cNvPr id="6" name="TextBox 5"/>
           <p:cNvSpPr txBox="1"/>
           <p:nvPr/>
         </p:nvSpPr>
@@ -15538,41 +14733,6 @@
         </p:nvSpPr>
         <p:spPr>
           <a:xfrm>
-            <a:off x="2194560" y="6446520"/>
-            <a:ext cx="5943600" cy="274320"/>
-          </a:xfrm>
-          <a:prstGeom prst="rect">
-            <a:avLst/>
-          </a:prstGeom>
-          <a:noFill/>
-        </p:spPr>
-        <p:txBody>
-          <a:bodyPr wrap="square" anchor="t" lIns="0" rIns="0" tIns="0" bIns="0">
-            <a:spAutoFit/>
-          </a:bodyPr>
-          <a:lstStyle/>
-          <a:p>
-            <a:pPr algn="l"/>
-            <a:r>
-              <a:rPr sz="1000" b="1" i="0">
-                <a:solidFill>
-                  <a:srgbClr val="8F989D"/>
-                </a:solidFill>
-                <a:latin typeface="Calibri"/>
-              </a:rPr>
-              <a:t>Inicio 5:10 pm</a:t>
-            </a:r>
-          </a:p>
-        </p:txBody>
-      </p:sp>
-      <p:sp>
-        <p:nvSpPr>
-          <p:cNvPr id="6" name="TextBox 5"/>
-          <p:cNvSpPr txBox="1"/>
-          <p:nvPr/>
-        </p:nvSpPr>
-        <p:spPr>
-          <a:xfrm>
             <a:off x="11094415" y="6446520"/>
             <a:ext cx="548640" cy="274320"/>
           </a:xfrm>
@@ -15981,41 +15141,6 @@
         </p:nvSpPr>
         <p:spPr>
           <a:xfrm>
-            <a:off x="2194560" y="6446520"/>
-            <a:ext cx="5943600" cy="274320"/>
-          </a:xfrm>
-          <a:prstGeom prst="rect">
-            <a:avLst/>
-          </a:prstGeom>
-          <a:noFill/>
-        </p:spPr>
-        <p:txBody>
-          <a:bodyPr wrap="square" anchor="t" lIns="0" rIns="0" tIns="0" bIns="0">
-            <a:spAutoFit/>
-          </a:bodyPr>
-          <a:lstStyle/>
-          <a:p>
-            <a:pPr algn="l"/>
-            <a:r>
-              <a:rPr sz="1000" b="1" i="0">
-                <a:solidFill>
-                  <a:srgbClr val="8F989D"/>
-                </a:solidFill>
-                <a:latin typeface="Calibri"/>
-              </a:rPr>
-              <a:t>Inicio 5:10 pm</a:t>
-            </a:r>
-          </a:p>
-        </p:txBody>
-      </p:sp>
-      <p:sp>
-        <p:nvSpPr>
-          <p:cNvPr id="7" name="TextBox 6"/>
-          <p:cNvSpPr txBox="1"/>
-          <p:nvPr/>
-        </p:nvSpPr>
-        <p:spPr>
-          <a:xfrm>
             <a:off x="11094415" y="6446520"/>
             <a:ext cx="548640" cy="274320"/>
           </a:xfrm>
@@ -16534,41 +15659,6 @@
       <p:sp>
         <p:nvSpPr>
           <p:cNvPr id="5" name="TextBox 4"/>
-          <p:cNvSpPr txBox="1"/>
-          <p:nvPr/>
-        </p:nvSpPr>
-        <p:spPr>
-          <a:xfrm>
-            <a:off x="2194560" y="6446520"/>
-            <a:ext cx="5943600" cy="274320"/>
-          </a:xfrm>
-          <a:prstGeom prst="rect">
-            <a:avLst/>
-          </a:prstGeom>
-          <a:noFill/>
-        </p:spPr>
-        <p:txBody>
-          <a:bodyPr wrap="square" anchor="t" lIns="0" rIns="0" tIns="0" bIns="0">
-            <a:spAutoFit/>
-          </a:bodyPr>
-          <a:lstStyle/>
-          <a:p>
-            <a:pPr algn="l"/>
-            <a:r>
-              <a:rPr sz="1000" b="1" i="0">
-                <a:solidFill>
-                  <a:srgbClr val="8F989D"/>
-                </a:solidFill>
-                <a:latin typeface="Calibri"/>
-              </a:rPr>
-              <a:t>Inicio 5:10 pm</a:t>
-            </a:r>
-          </a:p>
-        </p:txBody>
-      </p:sp>
-      <p:sp>
-        <p:nvSpPr>
-          <p:cNvPr id="6" name="TextBox 5"/>
           <p:cNvSpPr txBox="1"/>
           <p:nvPr/>
         </p:nvSpPr>

--- a/Pregrado/Creatividad y pensamiento innovador/Clases/Sesion 05 - Análisis de negocios · validación de la propuesta/Presentacion.pptx
+++ b/Pregrado/Creatividad y pensamiento innovador/Clases/Sesion 05 - Análisis de negocios · validación de la propuesta/Presentacion.pptx
@@ -10743,7 +10743,7 @@
                 </a:solidFill>
                 <a:latin typeface="Calibri"/>
               </a:rPr>
-              <a:t>`S06_CanvasMVP_Apellido`</a:t>
+              <a:t>`S05_CanvasMVP_Apellido`</a:t>
             </a:r>
             <a:r>
               <a:rPr sz="1600" b="0" i="0">
@@ -11157,7 +11157,7 @@
                 </a:solidFill>
                 <a:latin typeface="Calibri"/>
               </a:rPr>
-              <a:t>`S06_CanvasMVP_Apellido`</a:t>
+              <a:t>`S05_CanvasMVP_Apellido`</a:t>
             </a:r>
             <a:r>
               <a:rPr sz="1600" b="0" i="0">
